--- a/downloads/presentations/IED_Unit0_Lesson_0.2_Engineering_Notebook_Setup_and_Course_Resources.pptx
+++ b/downloads/presentations/IED_Unit0_Lesson_0.2_Engineering_Notebook_Setup_and_Course_Resources.pptx
@@ -2046,7 +2046,10 @@
         </p:spPr>
         <p:txBody>
           <a:bodyPr/>
-          <a:p/>
+          <a:lstStyle/>
+          <a:p>
+            <a:endParaRPr/>
+          </a:p>
         </p:txBody>
       </p:sp>
       <p:pic>
@@ -2105,7 +2108,10 @@
         </p:spPr>
         <p:txBody>
           <a:bodyPr/>
-          <a:p/>
+          <a:lstStyle/>
+          <a:p>
+            <a:endParaRPr/>
+          </a:p>
         </p:txBody>
       </p:sp>
       <p:sp>
@@ -2155,7 +2161,7 @@
         </p:nvSpPr>
         <p:spPr>
           <a:xfrm>
-            <a:off x="713232" y="1874520"/>
+            <a:off x="713232" y="2130552"/>
             <a:ext cx="6400800" cy="1207008"/>
           </a:xfrm>
           <a:prstGeom prst="rect">
@@ -2191,17 +2197,6 @@
             <a:pPr marL="0" indent="0">
               <a:buNone/>
             </a:pPr>
-            <a:r>
-              <a:rPr lang="en-US" sz="3600" b="1" dirty="0">
-                <a:solidFill>
-                  <a:srgbClr val="FFFFFF"/>
-                </a:solidFill>
-                <a:latin typeface="Aptos Display" pitchFamily="34" charset="0"/>
-                <a:ea typeface="Aptos Display" pitchFamily="34" charset="-122"/>
-                <a:cs typeface="Aptos Display" pitchFamily="34" charset="-120"/>
-              </a:rPr>
-              <a:t/>
-            </a:r>
             <a:endParaRPr lang="en-US" sz="3600" dirty="0"/>
           </a:p>
         </p:txBody>
@@ -2236,7 +2231,10 @@
         </p:spPr>
         <p:txBody>
           <a:bodyPr/>
-          <a:p/>
+          <a:lstStyle/>
+          <a:p>
+            <a:endParaRPr/>
+          </a:p>
         </p:txBody>
       </p:sp>
       <p:sp>
@@ -2347,7 +2345,10 @@
         </p:spPr>
         <p:txBody>
           <a:bodyPr/>
-          <a:p/>
+          <a:lstStyle/>
+          <a:p>
+            <a:endParaRPr/>
+          </a:p>
         </p:txBody>
       </p:sp>
       <p:sp>
@@ -2450,7 +2451,10 @@
         </p:spPr>
         <p:txBody>
           <a:bodyPr/>
-          <a:p/>
+          <a:lstStyle/>
+          <a:p>
+            <a:endParaRPr/>
+          </a:p>
         </p:txBody>
       </p:sp>
       <p:sp>
@@ -2553,7 +2557,10 @@
         </p:spPr>
         <p:txBody>
           <a:bodyPr/>
-          <a:p/>
+          <a:lstStyle/>
+          <a:p>
+            <a:endParaRPr/>
+          </a:p>
         </p:txBody>
       </p:sp>
       <p:sp>
@@ -2728,7 +2735,10 @@
         </p:spPr>
         <p:txBody>
           <a:bodyPr/>
-          <a:p/>
+          <a:lstStyle/>
+          <a:p>
+            <a:endParaRPr/>
+          </a:p>
         </p:txBody>
       </p:sp>
       <p:sp>
@@ -2902,7 +2912,10 @@
         </p:spPr>
         <p:txBody>
           <a:bodyPr/>
-          <a:p/>
+          <a:lstStyle/>
+          <a:p>
+            <a:endParaRPr/>
+          </a:p>
         </p:txBody>
       </p:sp>
       <p:sp>
@@ -3007,7 +3020,10 @@
         </p:spPr>
         <p:txBody>
           <a:bodyPr/>
-          <a:p/>
+          <a:lstStyle/>
+          <a:p>
+            <a:endParaRPr/>
+          </a:p>
         </p:txBody>
       </p:sp>
       <p:sp>
@@ -3040,7 +3056,10 @@
         </p:spPr>
         <p:txBody>
           <a:bodyPr/>
-          <a:p/>
+          <a:lstStyle/>
+          <a:p>
+            <a:endParaRPr/>
+          </a:p>
         </p:txBody>
       </p:sp>
       <p:sp>
@@ -3145,7 +3164,10 @@
         </p:spPr>
         <p:txBody>
           <a:bodyPr/>
-          <a:p/>
+          <a:lstStyle/>
+          <a:p>
+            <a:endParaRPr/>
+          </a:p>
         </p:txBody>
       </p:sp>
       <p:sp>
@@ -3178,7 +3200,10 @@
         </p:spPr>
         <p:txBody>
           <a:bodyPr/>
-          <a:p/>
+          <a:lstStyle/>
+          <a:p>
+            <a:endParaRPr/>
+          </a:p>
         </p:txBody>
       </p:sp>
       <p:sp>
@@ -3321,7 +3346,10 @@
         </p:spPr>
         <p:txBody>
           <a:bodyPr/>
-          <a:p/>
+          <a:lstStyle/>
+          <a:p>
+            <a:endParaRPr/>
+          </a:p>
         </p:txBody>
       </p:sp>
       <p:sp>
@@ -3390,7 +3418,10 @@
         </p:spPr>
         <p:txBody>
           <a:bodyPr/>
-          <a:p/>
+          <a:lstStyle/>
+          <a:p>
+            <a:endParaRPr/>
+          </a:p>
         </p:txBody>
       </p:sp>
       <p:sp>
@@ -3459,7 +3490,10 @@
         </p:spPr>
         <p:txBody>
           <a:bodyPr/>
-          <a:p/>
+          <a:lstStyle/>
+          <a:p>
+            <a:endParaRPr/>
+          </a:p>
         </p:txBody>
       </p:sp>
       <p:sp>
@@ -3528,7 +3562,10 @@
         </p:spPr>
         <p:txBody>
           <a:bodyPr/>
-          <a:p/>
+          <a:lstStyle/>
+          <a:p>
+            <a:endParaRPr/>
+          </a:p>
         </p:txBody>
       </p:sp>
       <p:sp>
@@ -3597,7 +3634,10 @@
         </p:spPr>
         <p:txBody>
           <a:bodyPr/>
-          <a:p/>
+          <a:lstStyle/>
+          <a:p>
+            <a:endParaRPr/>
+          </a:p>
         </p:txBody>
       </p:sp>
       <p:sp>
@@ -3666,7 +3706,10 @@
         </p:spPr>
         <p:txBody>
           <a:bodyPr/>
-          <a:p/>
+          <a:lstStyle/>
+          <a:p>
+            <a:endParaRPr/>
+          </a:p>
         </p:txBody>
       </p:sp>
       <p:sp>
@@ -3731,7 +3774,10 @@
         </p:spPr>
         <p:txBody>
           <a:bodyPr/>
-          <a:p/>
+          <a:lstStyle/>
+          <a:p>
+            <a:endParaRPr/>
+          </a:p>
         </p:txBody>
       </p:sp>
       <p:sp>
@@ -3873,7 +3919,10 @@
         </p:spPr>
         <p:txBody>
           <a:bodyPr/>
-          <a:p/>
+          <a:lstStyle/>
+          <a:p>
+            <a:endParaRPr/>
+          </a:p>
         </p:txBody>
       </p:sp>
       <p:sp>
@@ -4047,7 +4096,10 @@
         </p:spPr>
         <p:txBody>
           <a:bodyPr/>
-          <a:p/>
+          <a:lstStyle/>
+          <a:p>
+            <a:endParaRPr/>
+          </a:p>
         </p:txBody>
       </p:sp>
       <p:sp>
@@ -4190,7 +4242,10 @@
         </p:spPr>
         <p:txBody>
           <a:bodyPr/>
-          <a:p/>
+          <a:lstStyle/>
+          <a:p>
+            <a:endParaRPr/>
+          </a:p>
         </p:txBody>
       </p:sp>
       <p:sp>
@@ -4297,7 +4352,10 @@
         </p:spPr>
         <p:txBody>
           <a:bodyPr/>
-          <a:p/>
+          <a:lstStyle/>
+          <a:p>
+            <a:endParaRPr/>
+          </a:p>
         </p:txBody>
       </p:sp>
       <p:sp>
@@ -4404,7 +4462,10 @@
         </p:spPr>
         <p:txBody>
           <a:bodyPr/>
-          <a:p/>
+          <a:lstStyle/>
+          <a:p>
+            <a:endParaRPr/>
+          </a:p>
         </p:txBody>
       </p:sp>
       <p:sp>
@@ -4511,7 +4572,10 @@
         </p:spPr>
         <p:txBody>
           <a:bodyPr/>
-          <a:p/>
+          <a:lstStyle/>
+          <a:p>
+            <a:endParaRPr/>
+          </a:p>
         </p:txBody>
       </p:sp>
       <p:sp>
@@ -4618,7 +4682,10 @@
         </p:spPr>
         <p:txBody>
           <a:bodyPr/>
-          <a:p/>
+          <a:lstStyle/>
+          <a:p>
+            <a:endParaRPr/>
+          </a:p>
         </p:txBody>
       </p:sp>
       <p:sp>
@@ -4725,7 +4792,10 @@
         </p:spPr>
         <p:txBody>
           <a:bodyPr/>
-          <a:p/>
+          <a:lstStyle/>
+          <a:p>
+            <a:endParaRPr/>
+          </a:p>
         </p:txBody>
       </p:sp>
       <p:sp>
@@ -4792,7 +4862,10 @@
         </p:spPr>
         <p:txBody>
           <a:bodyPr/>
-          <a:p/>
+          <a:lstStyle/>
+          <a:p>
+            <a:endParaRPr/>
+          </a:p>
         </p:txBody>
       </p:sp>
       <p:sp>
@@ -4934,7 +5007,10 @@
         </p:spPr>
         <p:txBody>
           <a:bodyPr/>
-          <a:p/>
+          <a:lstStyle/>
+          <a:p>
+            <a:endParaRPr/>
+          </a:p>
         </p:txBody>
       </p:sp>
       <p:sp>
@@ -5144,7 +5220,10 @@
         </p:spPr>
         <p:txBody>
           <a:bodyPr/>
-          <a:p/>
+          <a:lstStyle/>
+          <a:p>
+            <a:endParaRPr/>
+          </a:p>
         </p:txBody>
       </p:sp>
       <p:sp>
@@ -5289,7 +5368,10 @@
         </p:spPr>
         <p:txBody>
           <a:bodyPr/>
-          <a:p/>
+          <a:lstStyle/>
+          <a:p>
+            <a:endParaRPr/>
+          </a:p>
         </p:txBody>
       </p:sp>
       <p:sp>
@@ -5468,7 +5550,10 @@
         </p:spPr>
         <p:txBody>
           <a:bodyPr/>
-          <a:p/>
+          <a:lstStyle/>
+          <a:p>
+            <a:endParaRPr/>
+          </a:p>
         </p:txBody>
       </p:sp>
       <p:sp>
@@ -5610,7 +5695,10 @@
         </p:spPr>
         <p:txBody>
           <a:bodyPr/>
-          <a:p/>
+          <a:lstStyle/>
+          <a:p>
+            <a:endParaRPr/>
+          </a:p>
         </p:txBody>
       </p:sp>
       <p:sp>
@@ -5822,7 +5910,10 @@
         </p:spPr>
         <p:txBody>
           <a:bodyPr/>
-          <a:p/>
+          <a:lstStyle/>
+          <a:p>
+            <a:endParaRPr/>
+          </a:p>
         </p:txBody>
       </p:sp>
       <p:sp>
@@ -5929,7 +6020,10 @@
         </p:spPr>
         <p:txBody>
           <a:bodyPr/>
-          <a:p/>
+          <a:lstStyle/>
+          <a:p>
+            <a:endParaRPr/>
+          </a:p>
         </p:txBody>
       </p:sp>
       <p:sp>
@@ -6036,7 +6130,10 @@
         </p:spPr>
         <p:txBody>
           <a:bodyPr/>
-          <a:p/>
+          <a:lstStyle/>
+          <a:p>
+            <a:endParaRPr/>
+          </a:p>
         </p:txBody>
       </p:sp>
       <p:sp>
@@ -6143,7 +6240,10 @@
         </p:spPr>
         <p:txBody>
           <a:bodyPr/>
-          <a:p/>
+          <a:lstStyle/>
+          <a:p>
+            <a:endParaRPr/>
+          </a:p>
         </p:txBody>
       </p:sp>
       <p:sp>
@@ -6250,7 +6350,10 @@
         </p:spPr>
         <p:txBody>
           <a:bodyPr/>
-          <a:p/>
+          <a:lstStyle/>
+          <a:p>
+            <a:endParaRPr/>
+          </a:p>
         </p:txBody>
       </p:sp>
       <p:sp>
@@ -6317,7 +6420,10 @@
         </p:spPr>
         <p:txBody>
           <a:bodyPr/>
-          <a:p/>
+          <a:lstStyle/>
+          <a:p>
+            <a:endParaRPr/>
+          </a:p>
         </p:txBody>
       </p:sp>
       <p:sp>
@@ -6459,7 +6565,10 @@
         </p:spPr>
         <p:txBody>
           <a:bodyPr/>
-          <a:p/>
+          <a:lstStyle/>
+          <a:p>
+            <a:endParaRPr/>
+          </a:p>
         </p:txBody>
       </p:sp>
       <p:sp>
@@ -6669,7 +6778,10 @@
         </p:spPr>
         <p:txBody>
           <a:bodyPr/>
-          <a:p/>
+          <a:lstStyle/>
+          <a:p>
+            <a:endParaRPr/>
+          </a:p>
         </p:txBody>
       </p:sp>
       <p:sp>
@@ -6740,7 +6852,10 @@
         </p:spPr>
         <p:txBody>
           <a:bodyPr/>
-          <a:p/>
+          <a:lstStyle/>
+          <a:p>
+            <a:endParaRPr/>
+          </a:p>
         </p:txBody>
       </p:sp>
       <p:sp>
@@ -6849,7 +6964,10 @@
         </p:spPr>
         <p:txBody>
           <a:bodyPr/>
-          <a:p/>
+          <a:lstStyle/>
+          <a:p>
+            <a:endParaRPr/>
+          </a:p>
         </p:txBody>
       </p:sp>
       <p:sp>
@@ -6958,7 +7076,10 @@
         </p:spPr>
         <p:txBody>
           <a:bodyPr/>
-          <a:p/>
+          <a:lstStyle/>
+          <a:p>
+            <a:endParaRPr/>
+          </a:p>
         </p:txBody>
       </p:sp>
       <p:sp>
@@ -7101,7 +7222,10 @@
         </p:spPr>
         <p:txBody>
           <a:bodyPr/>
-          <a:p/>
+          <a:lstStyle/>
+          <a:p>
+            <a:endParaRPr/>
+          </a:p>
         </p:txBody>
       </p:sp>
       <p:sp>
@@ -7243,7 +7367,10 @@
         </p:spPr>
         <p:txBody>
           <a:bodyPr/>
-          <a:p/>
+          <a:lstStyle/>
+          <a:p>
+            <a:endParaRPr/>
+          </a:p>
         </p:txBody>
       </p:sp>
       <p:sp>
@@ -7404,20 +7531,21 @@
             </a:avLst>
           </a:prstGeom>
           <a:solidFill>
-            <a:srgbClr val="F4FAFF"/>
+            <a:srgbClr val="0F3156"/>
           </a:solidFill>
           <a:ln w="15240">
             <a:solidFill>
-              <a:srgbClr val="A7D8F5">
-                <a:alpha val="85000"/>
-              </a:srgbClr>
+              <a:srgbClr val="4DDCFF"/>
             </a:solidFill>
             <a:prstDash val="solid"/>
           </a:ln>
         </p:spPr>
         <p:txBody>
           <a:bodyPr/>
-          <a:p/>
+          <a:lstStyle/>
+          <a:p>
+            <a:endParaRPr/>
+          </a:p>
         </p:txBody>
       </p:sp>
       <p:sp>
@@ -7435,7 +7563,7 @@
             <a:avLst/>
           </a:prstGeom>
           <a:solidFill>
-            <a:srgbClr val="6D7F8E"/>
+            <a:srgbClr val="4DDCFF"/>
           </a:solidFill>
           <a:ln w="12700">
             <a:solidFill>
@@ -7448,7 +7576,10 @@
         </p:spPr>
         <p:txBody>
           <a:bodyPr/>
-          <a:p/>
+          <a:lstStyle/>
+          <a:p>
+            <a:endParaRPr/>
+          </a:p>
         </p:txBody>
       </p:sp>
       <p:sp>
@@ -7459,8 +7590,8 @@
         </p:nvSpPr>
         <p:spPr>
           <a:xfrm>
-            <a:off x="1371600" y="2048256"/>
-            <a:ext cx="146304" cy="73152"/>
+            <a:off x="1321308" y="1979676"/>
+            <a:ext cx="283464" cy="310896"/>
           </a:xfrm>
           <a:prstGeom prst="rect">
             <a:avLst/>
@@ -7476,11 +7607,7 @@
               <a:buNone/>
             </a:pPr>
             <a:r>
-              <a:rPr lang="en-US" sz="800" b="1" dirty="0">
-                <a:solidFill>
-                  <a:srgbClr val="FFFFFF"/>
-                </a:solidFill>
-              </a:rPr>
+              <a:rPr lang="en-US" sz="800" b="1" dirty="0"/>
               <a:t>A</a:t>
             </a:r>
             <a:endParaRPr lang="en-US" sz="800" dirty="0"/>
@@ -7591,7 +7718,10 @@
         </p:spPr>
         <p:txBody>
           <a:bodyPr/>
-          <a:p/>
+          <a:lstStyle/>
+          <a:p>
+            <a:endParaRPr/>
+          </a:p>
         </p:txBody>
       </p:sp>
       <p:sp>
@@ -7622,7 +7752,10 @@
         </p:spPr>
         <p:txBody>
           <a:bodyPr/>
-          <a:p/>
+          <a:lstStyle/>
+          <a:p>
+            <a:endParaRPr/>
+          </a:p>
         </p:txBody>
       </p:sp>
       <p:sp>
@@ -7765,7 +7898,10 @@
         </p:spPr>
         <p:txBody>
           <a:bodyPr/>
-          <a:p/>
+          <a:lstStyle/>
+          <a:p>
+            <a:endParaRPr/>
+          </a:p>
         </p:txBody>
       </p:sp>
       <p:sp>
@@ -7796,7 +7932,10 @@
         </p:spPr>
         <p:txBody>
           <a:bodyPr/>
-          <a:p/>
+          <a:lstStyle/>
+          <a:p>
+            <a:endParaRPr/>
+          </a:p>
         </p:txBody>
       </p:sp>
       <p:sp>
@@ -7939,7 +8078,10 @@
         </p:spPr>
         <p:txBody>
           <a:bodyPr/>
-          <a:p/>
+          <a:lstStyle/>
+          <a:p>
+            <a:endParaRPr/>
+          </a:p>
         </p:txBody>
       </p:sp>
       <p:sp>
@@ -8006,7 +8148,10 @@
         </p:spPr>
         <p:txBody>
           <a:bodyPr/>
-          <a:p/>
+          <a:lstStyle/>
+          <a:p>
+            <a:endParaRPr/>
+          </a:p>
         </p:txBody>
       </p:sp>
       <p:sp>
@@ -8148,7 +8293,10 @@
         </p:spPr>
         <p:txBody>
           <a:bodyPr/>
-          <a:p/>
+          <a:lstStyle/>
+          <a:p>
+            <a:endParaRPr/>
+          </a:p>
         </p:txBody>
       </p:sp>
       <p:sp>
@@ -8309,20 +8457,21 @@
             </a:avLst>
           </a:prstGeom>
           <a:solidFill>
-            <a:srgbClr val="F4FAFF"/>
+            <a:srgbClr val="0F3156"/>
           </a:solidFill>
           <a:ln w="15240">
             <a:solidFill>
-              <a:srgbClr val="A7D8F5">
-                <a:alpha val="85000"/>
-              </a:srgbClr>
+              <a:srgbClr val="2EE6A6"/>
             </a:solidFill>
             <a:prstDash val="solid"/>
           </a:ln>
         </p:spPr>
         <p:txBody>
           <a:bodyPr/>
-          <a:p/>
+          <a:lstStyle/>
+          <a:p>
+            <a:endParaRPr/>
+          </a:p>
         </p:txBody>
       </p:sp>
       <p:sp>
@@ -8340,7 +8489,7 @@
             <a:avLst/>
           </a:prstGeom>
           <a:solidFill>
-            <a:srgbClr val="6D7F8E"/>
+            <a:srgbClr val="2EE6A6"/>
           </a:solidFill>
           <a:ln w="12700">
             <a:solidFill>
@@ -8353,7 +8502,10 @@
         </p:spPr>
         <p:txBody>
           <a:bodyPr/>
-          <a:p/>
+          <a:lstStyle/>
+          <a:p>
+            <a:endParaRPr/>
+          </a:p>
         </p:txBody>
       </p:sp>
       <p:sp>
@@ -8381,11 +8533,7 @@
               <a:buNone/>
             </a:pPr>
             <a:r>
-              <a:rPr lang="en-US" sz="800" b="1" dirty="0">
-                <a:solidFill>
-                  <a:srgbClr val="FFFFFF"/>
-                </a:solidFill>
-              </a:rPr>
+              <a:rPr lang="en-US" sz="800" b="1" dirty="0"/>
               <a:t>A</a:t>
             </a:r>
             <a:endParaRPr lang="en-US" sz="800" dirty="0"/>
@@ -8498,7 +8646,10 @@
         </p:spPr>
         <p:txBody>
           <a:bodyPr/>
-          <a:p/>
+          <a:lstStyle/>
+          <a:p>
+            <a:endParaRPr/>
+          </a:p>
         </p:txBody>
       </p:sp>
       <p:sp>
@@ -8529,7 +8680,10 @@
         </p:spPr>
         <p:txBody>
           <a:bodyPr/>
-          <a:p/>
+          <a:lstStyle/>
+          <a:p>
+            <a:endParaRPr/>
+          </a:p>
         </p:txBody>
       </p:sp>
       <p:sp>
@@ -8674,7 +8828,10 @@
         </p:spPr>
         <p:txBody>
           <a:bodyPr/>
-          <a:p/>
+          <a:lstStyle/>
+          <a:p>
+            <a:endParaRPr/>
+          </a:p>
         </p:txBody>
       </p:sp>
       <p:sp>
@@ -8705,7 +8862,10 @@
         </p:spPr>
         <p:txBody>
           <a:bodyPr/>
-          <a:p/>
+          <a:lstStyle/>
+          <a:p>
+            <a:endParaRPr/>
+          </a:p>
         </p:txBody>
       </p:sp>
       <p:sp>
@@ -8884,7 +9044,10 @@
         </p:spPr>
         <p:txBody>
           <a:bodyPr/>
-          <a:p/>
+          <a:lstStyle/>
+          <a:p>
+            <a:endParaRPr/>
+          </a:p>
         </p:txBody>
       </p:sp>
       <p:sp>
@@ -9026,7 +9189,10 @@
         </p:spPr>
         <p:txBody>
           <a:bodyPr/>
-          <a:p/>
+          <a:lstStyle/>
+          <a:p>
+            <a:endParaRPr/>
+          </a:p>
         </p:txBody>
       </p:sp>
       <p:sp>
@@ -9200,7 +9366,10 @@
         </p:spPr>
         <p:txBody>
           <a:bodyPr/>
-          <a:p/>
+          <a:lstStyle/>
+          <a:p>
+            <a:endParaRPr/>
+          </a:p>
         </p:txBody>
       </p:sp>
       <p:sp>
@@ -9267,7 +9436,10 @@
         </p:spPr>
         <p:txBody>
           <a:bodyPr/>
-          <a:p/>
+          <a:lstStyle/>
+          <a:p>
+            <a:endParaRPr/>
+          </a:p>
         </p:txBody>
       </p:sp>
       <p:sp>
@@ -9372,7 +9544,10 @@
         </p:spPr>
         <p:txBody>
           <a:bodyPr/>
-          <a:p/>
+          <a:lstStyle/>
+          <a:p>
+            <a:endParaRPr/>
+          </a:p>
         </p:txBody>
       </p:sp>
       <p:sp>
@@ -9477,7 +9652,10 @@
         </p:spPr>
         <p:txBody>
           <a:bodyPr/>
-          <a:p/>
+          <a:lstStyle/>
+          <a:p>
+            <a:endParaRPr/>
+          </a:p>
         </p:txBody>
       </p:sp>
       <p:sp>
@@ -9584,7 +9762,10 @@
         </p:spPr>
         <p:txBody>
           <a:bodyPr/>
-          <a:p/>
+          <a:lstStyle/>
+          <a:p>
+            <a:endParaRPr/>
+          </a:p>
         </p:txBody>
       </p:sp>
       <p:sp>
@@ -9649,7 +9830,10 @@
         </p:spPr>
         <p:txBody>
           <a:bodyPr/>
-          <a:p/>
+          <a:lstStyle/>
+          <a:p>
+            <a:endParaRPr/>
+          </a:p>
         </p:txBody>
       </p:sp>
       <p:sp>
@@ -9791,7 +9975,10 @@
         </p:spPr>
         <p:txBody>
           <a:bodyPr/>
-          <a:p/>
+          <a:lstStyle/>
+          <a:p>
+            <a:endParaRPr/>
+          </a:p>
         </p:txBody>
       </p:sp>
       <p:sp>
@@ -9965,7 +10152,10 @@
         </p:spPr>
         <p:txBody>
           <a:bodyPr/>
-          <a:p/>
+          <a:lstStyle/>
+          <a:p>
+            <a:endParaRPr/>
+          </a:p>
         </p:txBody>
       </p:sp>
       <p:sp>
@@ -10261,7 +10451,10 @@
         </p:spPr>
         <p:txBody>
           <a:bodyPr/>
-          <a:p/>
+          <a:lstStyle/>
+          <a:p>
+            <a:endParaRPr/>
+          </a:p>
         </p:txBody>
       </p:sp>
       <p:sp>
@@ -10368,7 +10561,10 @@
         </p:spPr>
         <p:txBody>
           <a:bodyPr/>
-          <a:p/>
+          <a:lstStyle/>
+          <a:p>
+            <a:endParaRPr/>
+          </a:p>
         </p:txBody>
       </p:sp>
       <p:sp>
@@ -10437,7 +10633,10 @@
         </p:spPr>
         <p:txBody>
           <a:bodyPr/>
-          <a:p/>
+          <a:lstStyle/>
+          <a:p>
+            <a:endParaRPr/>
+          </a:p>
         </p:txBody>
       </p:sp>
       <p:sp>
@@ -10544,7 +10743,10 @@
         </p:spPr>
         <p:txBody>
           <a:bodyPr/>
-          <a:p/>
+          <a:lstStyle/>
+          <a:p>
+            <a:endParaRPr/>
+          </a:p>
         </p:txBody>
       </p:sp>
       <p:sp>
@@ -10651,7 +10853,10 @@
         </p:spPr>
         <p:txBody>
           <a:bodyPr/>
-          <a:p/>
+          <a:lstStyle/>
+          <a:p>
+            <a:endParaRPr/>
+          </a:p>
         </p:txBody>
       </p:sp>
       <p:sp>
@@ -10758,7 +10963,10 @@
         </p:spPr>
         <p:txBody>
           <a:bodyPr/>
-          <a:p/>
+          <a:lstStyle/>
+          <a:p>
+            <a:endParaRPr/>
+          </a:p>
         </p:txBody>
       </p:sp>
       <p:sp>
@@ -10865,7 +11073,10 @@
         </p:spPr>
         <p:txBody>
           <a:bodyPr/>
-          <a:p/>
+          <a:lstStyle/>
+          <a:p>
+            <a:endParaRPr/>
+          </a:p>
         </p:txBody>
       </p:sp>
       <p:sp>
@@ -10972,7 +11183,10 @@
         </p:spPr>
         <p:txBody>
           <a:bodyPr/>
-          <a:p/>
+          <a:lstStyle/>
+          <a:p>
+            <a:endParaRPr/>
+          </a:p>
         </p:txBody>
       </p:sp>
       <p:sp>
@@ -11079,7 +11293,10 @@
         </p:spPr>
         <p:txBody>
           <a:bodyPr/>
-          <a:p/>
+          <a:lstStyle/>
+          <a:p>
+            <a:endParaRPr/>
+          </a:p>
         </p:txBody>
       </p:sp>
       <p:sp>
@@ -11182,7 +11399,10 @@
         </p:spPr>
         <p:txBody>
           <a:bodyPr/>
-          <a:p/>
+          <a:lstStyle/>
+          <a:p>
+            <a:endParaRPr/>
+          </a:p>
         </p:txBody>
       </p:sp>
       <p:sp>
@@ -11324,7 +11544,10 @@
         </p:spPr>
         <p:txBody>
           <a:bodyPr/>
-          <a:p/>
+          <a:lstStyle/>
+          <a:p>
+            <a:endParaRPr/>
+          </a:p>
         </p:txBody>
       </p:sp>
       <p:sp>
@@ -11536,7 +11759,10 @@
         </p:spPr>
         <p:txBody>
           <a:bodyPr/>
-          <a:p/>
+          <a:lstStyle/>
+          <a:p>
+            <a:endParaRPr/>
+          </a:p>
         </p:txBody>
       </p:sp>
       <p:sp>
@@ -11643,44 +11869,9 @@
         </p:spPr>
         <p:txBody>
           <a:bodyPr/>
-          <a:p/>
-        </p:txBody>
-      </p:sp>
-      <p:sp>
-        <p:nvSpPr>
-          <p:cNvPr id="12" name="Text 9"/>
-          <p:cNvSpPr/>
-          <p:nvPr/>
-        </p:nvSpPr>
-        <p:spPr>
-          <a:xfrm>
-            <a:off x="1600200" y="3776472"/>
-            <a:ext cx="8503920" cy="109728"/>
-          </a:xfrm>
-          <a:prstGeom prst="rect">
-            <a:avLst/>
-          </a:prstGeom>
-          <a:noFill/>
-          <a:ln/>
-        </p:spPr>
-        <p:txBody>
-          <a:bodyPr wrap="square" lIns="0" tIns="0" rIns="0" bIns="0" rtlCol="0" anchor="ctr">
-            <a:normAutofit/>
-          </a:bodyPr>
-          <a:lstStyle/>
-          <a:p>
-            <a:pPr marL="0" indent="0" algn="ctr">
-              <a:buNone/>
-            </a:pPr>
-            <a:r>
-              <a:rPr lang="en-US" sz="1080" b="1" dirty="0">
-                <a:solidFill>
-                  <a:srgbClr val="FFC857"/>
-                </a:solidFill>
-              </a:rPr>
-              <a:t>Student answers might include: remember decisions, prove results, share ideas, or avoid mistakes.</a:t>
-            </a:r>
-            <a:endParaRPr lang="en-US" sz="1080" dirty="0"/>
+          <a:lstStyle/>
+          <a:p>
+            <a:endParaRPr/>
           </a:p>
         </p:txBody>
       </p:sp>
@@ -11748,7 +11939,10 @@
         </p:spPr>
         <p:txBody>
           <a:bodyPr/>
-          <a:p/>
+          <a:lstStyle/>
+          <a:p>
+            <a:endParaRPr/>
+          </a:p>
         </p:txBody>
       </p:sp>
       <p:sp>
@@ -11890,7 +12084,10 @@
         </p:spPr>
         <p:txBody>
           <a:bodyPr/>
-          <a:p/>
+          <a:lstStyle/>
+          <a:p>
+            <a:endParaRPr/>
+          </a:p>
         </p:txBody>
       </p:sp>
       <p:sp>
@@ -12102,7 +12299,10 @@
         </p:spPr>
         <p:txBody>
           <a:bodyPr/>
-          <a:p/>
+          <a:lstStyle/>
+          <a:p>
+            <a:endParaRPr/>
+          </a:p>
         </p:txBody>
       </p:sp>
       <p:sp>
@@ -12211,7 +12411,10 @@
         </p:spPr>
         <p:txBody>
           <a:bodyPr/>
-          <a:p/>
+          <a:lstStyle/>
+          <a:p>
+            <a:endParaRPr/>
+          </a:p>
         </p:txBody>
       </p:sp>
       <p:sp>
@@ -12320,7 +12523,10 @@
         </p:spPr>
         <p:txBody>
           <a:bodyPr/>
-          <a:p/>
+          <a:lstStyle/>
+          <a:p>
+            <a:endParaRPr/>
+          </a:p>
         </p:txBody>
       </p:sp>
       <p:sp>
@@ -12429,7 +12635,10 @@
         </p:spPr>
         <p:txBody>
           <a:bodyPr/>
-          <a:p/>
+          <a:lstStyle/>
+          <a:p>
+            <a:endParaRPr/>
+          </a:p>
         </p:txBody>
       </p:sp>
       <p:sp>
@@ -12572,7 +12781,10 @@
         </p:spPr>
         <p:txBody>
           <a:bodyPr/>
-          <a:p/>
+          <a:lstStyle/>
+          <a:p>
+            <a:endParaRPr/>
+          </a:p>
         </p:txBody>
       </p:sp>
       <p:sp>
@@ -12714,7 +12926,10 @@
         </p:spPr>
         <p:txBody>
           <a:bodyPr/>
-          <a:p/>
+          <a:lstStyle/>
+          <a:p>
+            <a:endParaRPr/>
+          </a:p>
         </p:txBody>
       </p:sp>
       <p:sp>
@@ -12924,7 +13139,10 @@
         </p:spPr>
         <p:txBody>
           <a:bodyPr/>
-          <a:p/>
+          <a:lstStyle/>
+          <a:p>
+            <a:endParaRPr/>
+          </a:p>
         </p:txBody>
       </p:sp>
       <p:sp>
@@ -12955,7 +13173,10 @@
         </p:spPr>
         <p:txBody>
           <a:bodyPr/>
-          <a:p/>
+          <a:lstStyle/>
+          <a:p>
+            <a:endParaRPr/>
+          </a:p>
         </p:txBody>
       </p:sp>
       <p:sp>
@@ -13098,7 +13319,10 @@
         </p:spPr>
         <p:txBody>
           <a:bodyPr/>
-          <a:p/>
+          <a:lstStyle/>
+          <a:p>
+            <a:endParaRPr/>
+          </a:p>
         </p:txBody>
       </p:sp>
       <p:sp>
@@ -13129,7 +13353,10 @@
         </p:spPr>
         <p:txBody>
           <a:bodyPr/>
-          <a:p/>
+          <a:lstStyle/>
+          <a:p>
+            <a:endParaRPr/>
+          </a:p>
         </p:txBody>
       </p:sp>
       <p:sp>
@@ -13272,7 +13499,10 @@
         </p:spPr>
         <p:txBody>
           <a:bodyPr/>
-          <a:p/>
+          <a:lstStyle/>
+          <a:p>
+            <a:endParaRPr/>
+          </a:p>
         </p:txBody>
       </p:sp>
       <p:sp>
@@ -13303,7 +13533,10 @@
         </p:spPr>
         <p:txBody>
           <a:bodyPr/>
-          <a:p/>
+          <a:lstStyle/>
+          <a:p>
+            <a:endParaRPr/>
+          </a:p>
         </p:txBody>
       </p:sp>
       <p:sp>
@@ -13446,7 +13679,10 @@
         </p:spPr>
         <p:txBody>
           <a:bodyPr/>
-          <a:p/>
+          <a:lstStyle/>
+          <a:p>
+            <a:endParaRPr/>
+          </a:p>
         </p:txBody>
       </p:sp>
       <p:sp>
@@ -13477,7 +13713,10 @@
         </p:spPr>
         <p:txBody>
           <a:bodyPr/>
-          <a:p/>
+          <a:lstStyle/>
+          <a:p>
+            <a:endParaRPr/>
+          </a:p>
         </p:txBody>
       </p:sp>
       <p:sp>
@@ -13620,7 +13859,10 @@
         </p:spPr>
         <p:txBody>
           <a:bodyPr/>
-          <a:p/>
+          <a:lstStyle/>
+          <a:p>
+            <a:endParaRPr/>
+          </a:p>
         </p:txBody>
       </p:sp>
       <p:sp>
@@ -13687,7 +13929,10 @@
         </p:spPr>
         <p:txBody>
           <a:bodyPr/>
-          <a:p/>
+          <a:lstStyle/>
+          <a:p>
+            <a:endParaRPr/>
+          </a:p>
         </p:txBody>
       </p:sp>
       <p:sp>
@@ -13829,7 +14074,10 @@
         </p:spPr>
         <p:txBody>
           <a:bodyPr/>
-          <a:p/>
+          <a:lstStyle/>
+          <a:p>
+            <a:endParaRPr/>
+          </a:p>
         </p:txBody>
       </p:sp>
       <p:sp>
@@ -14039,7 +14287,10 @@
         </p:spPr>
         <p:txBody>
           <a:bodyPr/>
-          <a:p/>
+          <a:lstStyle/>
+          <a:p>
+            <a:endParaRPr/>
+          </a:p>
         </p:txBody>
       </p:sp>
       <p:sp>
@@ -14110,7 +14361,10 @@
         </p:spPr>
         <p:txBody>
           <a:bodyPr/>
-          <a:p/>
+          <a:lstStyle/>
+          <a:p>
+            <a:endParaRPr/>
+          </a:p>
         </p:txBody>
       </p:sp>
       <p:sp>
@@ -14219,7 +14473,10 @@
         </p:spPr>
         <p:txBody>
           <a:bodyPr/>
-          <a:p/>
+          <a:lstStyle/>
+          <a:p>
+            <a:endParaRPr/>
+          </a:p>
         </p:txBody>
       </p:sp>
       <p:sp>
@@ -14328,7 +14585,10 @@
         </p:spPr>
         <p:txBody>
           <a:bodyPr/>
-          <a:p/>
+          <a:lstStyle/>
+          <a:p>
+            <a:endParaRPr/>
+          </a:p>
         </p:txBody>
       </p:sp>
       <p:sp>
@@ -14433,7 +14693,10 @@
         </p:spPr>
         <p:txBody>
           <a:bodyPr/>
-          <a:p/>
+          <a:lstStyle/>
+          <a:p>
+            <a:endParaRPr/>
+          </a:p>
         </p:txBody>
       </p:sp>
       <p:sp>
@@ -14575,7 +14838,10 @@
         </p:spPr>
         <p:txBody>
           <a:bodyPr/>
-          <a:p/>
+          <a:lstStyle/>
+          <a:p>
+            <a:endParaRPr/>
+          </a:p>
         </p:txBody>
       </p:sp>
       <p:sp>
@@ -14749,7 +15015,10 @@
         </p:spPr>
         <p:txBody>
           <a:bodyPr/>
-          <a:p/>
+          <a:lstStyle/>
+          <a:p>
+            <a:endParaRPr/>
+          </a:p>
         </p:txBody>
       </p:sp>
       <p:sp>
@@ -15203,7 +15472,10 @@
         </p:spPr>
         <p:txBody>
           <a:bodyPr/>
-          <a:p/>
+          <a:lstStyle/>
+          <a:p>
+            <a:endParaRPr/>
+          </a:p>
         </p:txBody>
       </p:sp>
       <p:sp>
@@ -15653,7 +15925,10 @@
         </p:spPr>
         <p:txBody>
           <a:bodyPr/>
-          <a:p/>
+          <a:lstStyle/>
+          <a:p>
+            <a:endParaRPr/>
+          </a:p>
         </p:txBody>
       </p:sp>
       <p:sp>
@@ -15682,7 +15957,10 @@
         </p:spPr>
         <p:txBody>
           <a:bodyPr/>
-          <a:p/>
+          <a:lstStyle/>
+          <a:p>
+            <a:endParaRPr/>
+          </a:p>
         </p:txBody>
       </p:sp>
       <p:sp>
@@ -15824,7 +16102,10 @@
         </p:spPr>
         <p:txBody>
           <a:bodyPr/>
-          <a:p/>
+          <a:lstStyle/>
+          <a:p>
+            <a:endParaRPr/>
+          </a:p>
         </p:txBody>
       </p:sp>
       <p:sp>
@@ -15998,7 +16279,10 @@
         </p:spPr>
         <p:txBody>
           <a:bodyPr/>
-          <a:p/>
+          <a:lstStyle/>
+          <a:p>
+            <a:endParaRPr/>
+          </a:p>
         </p:txBody>
       </p:sp>
       <p:sp>
@@ -16526,7 +16810,10 @@
         </p:spPr>
         <p:txBody>
           <a:bodyPr/>
-          <a:p/>
+          <a:lstStyle/>
+          <a:p>
+            <a:endParaRPr/>
+          </a:p>
         </p:txBody>
       </p:sp>
       <p:sp>
@@ -16595,7 +16882,10 @@
         </p:spPr>
         <p:txBody>
           <a:bodyPr/>
-          <a:p/>
+          <a:lstStyle/>
+          <a:p>
+            <a:endParaRPr/>
+          </a:p>
         </p:txBody>
       </p:sp>
       <p:sp>
@@ -16702,7 +16992,10 @@
         </p:spPr>
         <p:txBody>
           <a:bodyPr/>
-          <a:p/>
+          <a:lstStyle/>
+          <a:p>
+            <a:endParaRPr/>
+          </a:p>
         </p:txBody>
       </p:sp>
       <p:sp>
@@ -16809,7 +17102,10 @@
         </p:spPr>
         <p:txBody>
           <a:bodyPr/>
-          <a:p/>
+          <a:lstStyle/>
+          <a:p>
+            <a:endParaRPr/>
+          </a:p>
         </p:txBody>
       </p:sp>
       <p:sp>
@@ -16916,7 +17212,10 @@
         </p:spPr>
         <p:txBody>
           <a:bodyPr/>
-          <a:p/>
+          <a:lstStyle/>
+          <a:p>
+            <a:endParaRPr/>
+          </a:p>
         </p:txBody>
       </p:sp>
       <p:sp>
@@ -17023,7 +17322,10 @@
         </p:spPr>
         <p:txBody>
           <a:bodyPr/>
-          <a:p/>
+          <a:lstStyle/>
+          <a:p>
+            <a:endParaRPr/>
+          </a:p>
         </p:txBody>
       </p:sp>
       <p:sp>
@@ -17164,7 +17466,10 @@
         </p:spPr>
         <p:txBody>
           <a:bodyPr/>
-          <a:p/>
+          <a:lstStyle/>
+          <a:p>
+            <a:endParaRPr/>
+          </a:p>
         </p:txBody>
       </p:sp>
       <p:sp>
@@ -17306,7 +17611,10 @@
         </p:spPr>
         <p:txBody>
           <a:bodyPr/>
-          <a:p/>
+          <a:lstStyle/>
+          <a:p>
+            <a:endParaRPr/>
+          </a:p>
         </p:txBody>
       </p:sp>
       <p:sp>
@@ -17480,7 +17788,10 @@
         </p:spPr>
         <p:txBody>
           <a:bodyPr/>
-          <a:p/>
+          <a:lstStyle/>
+          <a:p>
+            <a:endParaRPr/>
+          </a:p>
         </p:txBody>
       </p:sp>
       <p:sp>
@@ -17893,7 +18204,10 @@
         </p:spPr>
         <p:txBody>
           <a:bodyPr/>
-          <a:p/>
+          <a:lstStyle/>
+          <a:p>
+            <a:endParaRPr/>
+          </a:p>
         </p:txBody>
       </p:sp>
       <p:sp>
@@ -18304,7 +18618,10 @@
         </p:spPr>
         <p:txBody>
           <a:bodyPr/>
-          <a:p/>
+          <a:lstStyle/>
+          <a:p>
+            <a:endParaRPr/>
+          </a:p>
         </p:txBody>
       </p:sp>
       <p:sp>
@@ -18333,7 +18650,10 @@
         </p:spPr>
         <p:txBody>
           <a:bodyPr/>
-          <a:p/>
+          <a:lstStyle/>
+          <a:p>
+            <a:endParaRPr/>
+          </a:p>
         </p:txBody>
       </p:sp>
       <p:sp>

--- a/downloads/presentations/IED_Unit0_Lesson_0.2_Engineering_Notebook_Setup_and_Course_Resources.pptx
+++ b/downloads/presentations/IED_Unit0_Lesson_0.2_Engineering_Notebook_Setup_and_Course_Resources.pptx
@@ -2046,10 +2046,7 @@
         </p:spPr>
         <p:txBody>
           <a:bodyPr/>
-          <a:lstStyle/>
-          <a:p>
-            <a:endParaRPr/>
-          </a:p>
+          <a:p/>
         </p:txBody>
       </p:sp>
       <p:pic>
@@ -2108,10 +2105,7 @@
         </p:spPr>
         <p:txBody>
           <a:bodyPr/>
-          <a:lstStyle/>
-          <a:p>
-            <a:endParaRPr/>
-          </a:p>
+          <a:p/>
         </p:txBody>
       </p:sp>
       <p:sp>
@@ -2161,7 +2155,7 @@
         </p:nvSpPr>
         <p:spPr>
           <a:xfrm>
-            <a:off x="713232" y="2130552"/>
+            <a:off x="713232" y="1874520"/>
             <a:ext cx="6400800" cy="1207008"/>
           </a:xfrm>
           <a:prstGeom prst="rect">
@@ -2197,6 +2191,17 @@
             <a:pPr marL="0" indent="0">
               <a:buNone/>
             </a:pPr>
+            <a:r>
+              <a:rPr lang="en-US" sz="3600" b="1" dirty="0">
+                <a:solidFill>
+                  <a:srgbClr val="FFFFFF"/>
+                </a:solidFill>
+                <a:latin typeface="Aptos Display" pitchFamily="34" charset="0"/>
+                <a:ea typeface="Aptos Display" pitchFamily="34" charset="-122"/>
+                <a:cs typeface="Aptos Display" pitchFamily="34" charset="-120"/>
+              </a:rPr>
+              <a:t/>
+            </a:r>
             <a:endParaRPr lang="en-US" sz="3600" dirty="0"/>
           </a:p>
         </p:txBody>
@@ -2231,10 +2236,7 @@
         </p:spPr>
         <p:txBody>
           <a:bodyPr/>
-          <a:lstStyle/>
-          <a:p>
-            <a:endParaRPr/>
-          </a:p>
+          <a:p/>
         </p:txBody>
       </p:sp>
       <p:sp>
@@ -2345,10 +2347,7 @@
         </p:spPr>
         <p:txBody>
           <a:bodyPr/>
-          <a:lstStyle/>
-          <a:p>
-            <a:endParaRPr/>
-          </a:p>
+          <a:p/>
         </p:txBody>
       </p:sp>
       <p:sp>
@@ -2451,10 +2450,7 @@
         </p:spPr>
         <p:txBody>
           <a:bodyPr/>
-          <a:lstStyle/>
-          <a:p>
-            <a:endParaRPr/>
-          </a:p>
+          <a:p/>
         </p:txBody>
       </p:sp>
       <p:sp>
@@ -2557,10 +2553,7 @@
         </p:spPr>
         <p:txBody>
           <a:bodyPr/>
-          <a:lstStyle/>
-          <a:p>
-            <a:endParaRPr/>
-          </a:p>
+          <a:p/>
         </p:txBody>
       </p:sp>
       <p:sp>
@@ -2735,10 +2728,7 @@
         </p:spPr>
         <p:txBody>
           <a:bodyPr/>
-          <a:lstStyle/>
-          <a:p>
-            <a:endParaRPr/>
-          </a:p>
+          <a:p/>
         </p:txBody>
       </p:sp>
       <p:sp>
@@ -2912,10 +2902,7 @@
         </p:spPr>
         <p:txBody>
           <a:bodyPr/>
-          <a:lstStyle/>
-          <a:p>
-            <a:endParaRPr/>
-          </a:p>
+          <a:p/>
         </p:txBody>
       </p:sp>
       <p:sp>
@@ -3020,10 +3007,7 @@
         </p:spPr>
         <p:txBody>
           <a:bodyPr/>
-          <a:lstStyle/>
-          <a:p>
-            <a:endParaRPr/>
-          </a:p>
+          <a:p/>
         </p:txBody>
       </p:sp>
       <p:sp>
@@ -3056,10 +3040,7 @@
         </p:spPr>
         <p:txBody>
           <a:bodyPr/>
-          <a:lstStyle/>
-          <a:p>
-            <a:endParaRPr/>
-          </a:p>
+          <a:p/>
         </p:txBody>
       </p:sp>
       <p:sp>
@@ -3164,10 +3145,7 @@
         </p:spPr>
         <p:txBody>
           <a:bodyPr/>
-          <a:lstStyle/>
-          <a:p>
-            <a:endParaRPr/>
-          </a:p>
+          <a:p/>
         </p:txBody>
       </p:sp>
       <p:sp>
@@ -3200,10 +3178,7 @@
         </p:spPr>
         <p:txBody>
           <a:bodyPr/>
-          <a:lstStyle/>
-          <a:p>
-            <a:endParaRPr/>
-          </a:p>
+          <a:p/>
         </p:txBody>
       </p:sp>
       <p:sp>
@@ -3346,10 +3321,7 @@
         </p:spPr>
         <p:txBody>
           <a:bodyPr/>
-          <a:lstStyle/>
-          <a:p>
-            <a:endParaRPr/>
-          </a:p>
+          <a:p/>
         </p:txBody>
       </p:sp>
       <p:sp>
@@ -3418,10 +3390,7 @@
         </p:spPr>
         <p:txBody>
           <a:bodyPr/>
-          <a:lstStyle/>
-          <a:p>
-            <a:endParaRPr/>
-          </a:p>
+          <a:p/>
         </p:txBody>
       </p:sp>
       <p:sp>
@@ -3490,10 +3459,7 @@
         </p:spPr>
         <p:txBody>
           <a:bodyPr/>
-          <a:lstStyle/>
-          <a:p>
-            <a:endParaRPr/>
-          </a:p>
+          <a:p/>
         </p:txBody>
       </p:sp>
       <p:sp>
@@ -3562,10 +3528,7 @@
         </p:spPr>
         <p:txBody>
           <a:bodyPr/>
-          <a:lstStyle/>
-          <a:p>
-            <a:endParaRPr/>
-          </a:p>
+          <a:p/>
         </p:txBody>
       </p:sp>
       <p:sp>
@@ -3634,10 +3597,7 @@
         </p:spPr>
         <p:txBody>
           <a:bodyPr/>
-          <a:lstStyle/>
-          <a:p>
-            <a:endParaRPr/>
-          </a:p>
+          <a:p/>
         </p:txBody>
       </p:sp>
       <p:sp>
@@ -3706,10 +3666,7 @@
         </p:spPr>
         <p:txBody>
           <a:bodyPr/>
-          <a:lstStyle/>
-          <a:p>
-            <a:endParaRPr/>
-          </a:p>
+          <a:p/>
         </p:txBody>
       </p:sp>
       <p:sp>
@@ -3774,10 +3731,7 @@
         </p:spPr>
         <p:txBody>
           <a:bodyPr/>
-          <a:lstStyle/>
-          <a:p>
-            <a:endParaRPr/>
-          </a:p>
+          <a:p/>
         </p:txBody>
       </p:sp>
       <p:sp>
@@ -3919,10 +3873,7 @@
         </p:spPr>
         <p:txBody>
           <a:bodyPr/>
-          <a:lstStyle/>
-          <a:p>
-            <a:endParaRPr/>
-          </a:p>
+          <a:p/>
         </p:txBody>
       </p:sp>
       <p:sp>
@@ -4096,10 +4047,7 @@
         </p:spPr>
         <p:txBody>
           <a:bodyPr/>
-          <a:lstStyle/>
-          <a:p>
-            <a:endParaRPr/>
-          </a:p>
+          <a:p/>
         </p:txBody>
       </p:sp>
       <p:sp>
@@ -4242,10 +4190,7 @@
         </p:spPr>
         <p:txBody>
           <a:bodyPr/>
-          <a:lstStyle/>
-          <a:p>
-            <a:endParaRPr/>
-          </a:p>
+          <a:p/>
         </p:txBody>
       </p:sp>
       <p:sp>
@@ -4352,10 +4297,7 @@
         </p:spPr>
         <p:txBody>
           <a:bodyPr/>
-          <a:lstStyle/>
-          <a:p>
-            <a:endParaRPr/>
-          </a:p>
+          <a:p/>
         </p:txBody>
       </p:sp>
       <p:sp>
@@ -4462,10 +4404,7 @@
         </p:spPr>
         <p:txBody>
           <a:bodyPr/>
-          <a:lstStyle/>
-          <a:p>
-            <a:endParaRPr/>
-          </a:p>
+          <a:p/>
         </p:txBody>
       </p:sp>
       <p:sp>
@@ -4572,10 +4511,7 @@
         </p:spPr>
         <p:txBody>
           <a:bodyPr/>
-          <a:lstStyle/>
-          <a:p>
-            <a:endParaRPr/>
-          </a:p>
+          <a:p/>
         </p:txBody>
       </p:sp>
       <p:sp>
@@ -4682,10 +4618,7 @@
         </p:spPr>
         <p:txBody>
           <a:bodyPr/>
-          <a:lstStyle/>
-          <a:p>
-            <a:endParaRPr/>
-          </a:p>
+          <a:p/>
         </p:txBody>
       </p:sp>
       <p:sp>
@@ -4792,10 +4725,7 @@
         </p:spPr>
         <p:txBody>
           <a:bodyPr/>
-          <a:lstStyle/>
-          <a:p>
-            <a:endParaRPr/>
-          </a:p>
+          <a:p/>
         </p:txBody>
       </p:sp>
       <p:sp>
@@ -4862,10 +4792,7 @@
         </p:spPr>
         <p:txBody>
           <a:bodyPr/>
-          <a:lstStyle/>
-          <a:p>
-            <a:endParaRPr/>
-          </a:p>
+          <a:p/>
         </p:txBody>
       </p:sp>
       <p:sp>
@@ -5007,10 +4934,7 @@
         </p:spPr>
         <p:txBody>
           <a:bodyPr/>
-          <a:lstStyle/>
-          <a:p>
-            <a:endParaRPr/>
-          </a:p>
+          <a:p/>
         </p:txBody>
       </p:sp>
       <p:sp>
@@ -5220,10 +5144,7 @@
         </p:spPr>
         <p:txBody>
           <a:bodyPr/>
-          <a:lstStyle/>
-          <a:p>
-            <a:endParaRPr/>
-          </a:p>
+          <a:p/>
         </p:txBody>
       </p:sp>
       <p:sp>
@@ -5368,10 +5289,7 @@
         </p:spPr>
         <p:txBody>
           <a:bodyPr/>
-          <a:lstStyle/>
-          <a:p>
-            <a:endParaRPr/>
-          </a:p>
+          <a:p/>
         </p:txBody>
       </p:sp>
       <p:sp>
@@ -5550,10 +5468,7 @@
         </p:spPr>
         <p:txBody>
           <a:bodyPr/>
-          <a:lstStyle/>
-          <a:p>
-            <a:endParaRPr/>
-          </a:p>
+          <a:p/>
         </p:txBody>
       </p:sp>
       <p:sp>
@@ -5695,10 +5610,7 @@
         </p:spPr>
         <p:txBody>
           <a:bodyPr/>
-          <a:lstStyle/>
-          <a:p>
-            <a:endParaRPr/>
-          </a:p>
+          <a:p/>
         </p:txBody>
       </p:sp>
       <p:sp>
@@ -5910,10 +5822,7 @@
         </p:spPr>
         <p:txBody>
           <a:bodyPr/>
-          <a:lstStyle/>
-          <a:p>
-            <a:endParaRPr/>
-          </a:p>
+          <a:p/>
         </p:txBody>
       </p:sp>
       <p:sp>
@@ -6020,10 +5929,7 @@
         </p:spPr>
         <p:txBody>
           <a:bodyPr/>
-          <a:lstStyle/>
-          <a:p>
-            <a:endParaRPr/>
-          </a:p>
+          <a:p/>
         </p:txBody>
       </p:sp>
       <p:sp>
@@ -6130,10 +6036,7 @@
         </p:spPr>
         <p:txBody>
           <a:bodyPr/>
-          <a:lstStyle/>
-          <a:p>
-            <a:endParaRPr/>
-          </a:p>
+          <a:p/>
         </p:txBody>
       </p:sp>
       <p:sp>
@@ -6240,10 +6143,7 @@
         </p:spPr>
         <p:txBody>
           <a:bodyPr/>
-          <a:lstStyle/>
-          <a:p>
-            <a:endParaRPr/>
-          </a:p>
+          <a:p/>
         </p:txBody>
       </p:sp>
       <p:sp>
@@ -6350,10 +6250,7 @@
         </p:spPr>
         <p:txBody>
           <a:bodyPr/>
-          <a:lstStyle/>
-          <a:p>
-            <a:endParaRPr/>
-          </a:p>
+          <a:p/>
         </p:txBody>
       </p:sp>
       <p:sp>
@@ -6420,10 +6317,7 @@
         </p:spPr>
         <p:txBody>
           <a:bodyPr/>
-          <a:lstStyle/>
-          <a:p>
-            <a:endParaRPr/>
-          </a:p>
+          <a:p/>
         </p:txBody>
       </p:sp>
       <p:sp>
@@ -6565,10 +6459,7 @@
         </p:spPr>
         <p:txBody>
           <a:bodyPr/>
-          <a:lstStyle/>
-          <a:p>
-            <a:endParaRPr/>
-          </a:p>
+          <a:p/>
         </p:txBody>
       </p:sp>
       <p:sp>
@@ -6778,10 +6669,7 @@
         </p:spPr>
         <p:txBody>
           <a:bodyPr/>
-          <a:lstStyle/>
-          <a:p>
-            <a:endParaRPr/>
-          </a:p>
+          <a:p/>
         </p:txBody>
       </p:sp>
       <p:sp>
@@ -6852,10 +6740,7 @@
         </p:spPr>
         <p:txBody>
           <a:bodyPr/>
-          <a:lstStyle/>
-          <a:p>
-            <a:endParaRPr/>
-          </a:p>
+          <a:p/>
         </p:txBody>
       </p:sp>
       <p:sp>
@@ -6964,10 +6849,7 @@
         </p:spPr>
         <p:txBody>
           <a:bodyPr/>
-          <a:lstStyle/>
-          <a:p>
-            <a:endParaRPr/>
-          </a:p>
+          <a:p/>
         </p:txBody>
       </p:sp>
       <p:sp>
@@ -7076,10 +6958,7 @@
         </p:spPr>
         <p:txBody>
           <a:bodyPr/>
-          <a:lstStyle/>
-          <a:p>
-            <a:endParaRPr/>
-          </a:p>
+          <a:p/>
         </p:txBody>
       </p:sp>
       <p:sp>
@@ -7222,10 +7101,7 @@
         </p:spPr>
         <p:txBody>
           <a:bodyPr/>
-          <a:lstStyle/>
-          <a:p>
-            <a:endParaRPr/>
-          </a:p>
+          <a:p/>
         </p:txBody>
       </p:sp>
       <p:sp>
@@ -7367,10 +7243,7 @@
         </p:spPr>
         <p:txBody>
           <a:bodyPr/>
-          <a:lstStyle/>
-          <a:p>
-            <a:endParaRPr/>
-          </a:p>
+          <a:p/>
         </p:txBody>
       </p:sp>
       <p:sp>
@@ -7531,21 +7404,20 @@
             </a:avLst>
           </a:prstGeom>
           <a:solidFill>
-            <a:srgbClr val="0F3156"/>
+            <a:srgbClr val="F4FAFF"/>
           </a:solidFill>
           <a:ln w="15240">
             <a:solidFill>
-              <a:srgbClr val="4DDCFF"/>
+              <a:srgbClr val="A7D8F5">
+                <a:alpha val="85000"/>
+              </a:srgbClr>
             </a:solidFill>
             <a:prstDash val="solid"/>
           </a:ln>
         </p:spPr>
         <p:txBody>
           <a:bodyPr/>
-          <a:lstStyle/>
-          <a:p>
-            <a:endParaRPr/>
-          </a:p>
+          <a:p/>
         </p:txBody>
       </p:sp>
       <p:sp>
@@ -7563,7 +7435,7 @@
             <a:avLst/>
           </a:prstGeom>
           <a:solidFill>
-            <a:srgbClr val="4DDCFF"/>
+            <a:srgbClr val="6D7F8E"/>
           </a:solidFill>
           <a:ln w="12700">
             <a:solidFill>
@@ -7576,10 +7448,7 @@
         </p:spPr>
         <p:txBody>
           <a:bodyPr/>
-          <a:lstStyle/>
-          <a:p>
-            <a:endParaRPr/>
-          </a:p>
+          <a:p/>
         </p:txBody>
       </p:sp>
       <p:sp>
@@ -7590,8 +7459,8 @@
         </p:nvSpPr>
         <p:spPr>
           <a:xfrm>
-            <a:off x="1321308" y="1979676"/>
-            <a:ext cx="283464" cy="310896"/>
+            <a:off x="1371600" y="2048256"/>
+            <a:ext cx="146304" cy="73152"/>
           </a:xfrm>
           <a:prstGeom prst="rect">
             <a:avLst/>
@@ -7607,7 +7476,11 @@
               <a:buNone/>
             </a:pPr>
             <a:r>
-              <a:rPr lang="en-US" sz="800" b="1" dirty="0"/>
+              <a:rPr lang="en-US" sz="800" b="1" dirty="0">
+                <a:solidFill>
+                  <a:srgbClr val="FFFFFF"/>
+                </a:solidFill>
+              </a:rPr>
               <a:t>A</a:t>
             </a:r>
             <a:endParaRPr lang="en-US" sz="800" dirty="0"/>
@@ -7718,10 +7591,7 @@
         </p:spPr>
         <p:txBody>
           <a:bodyPr/>
-          <a:lstStyle/>
-          <a:p>
-            <a:endParaRPr/>
-          </a:p>
+          <a:p/>
         </p:txBody>
       </p:sp>
       <p:sp>
@@ -7752,10 +7622,7 @@
         </p:spPr>
         <p:txBody>
           <a:bodyPr/>
-          <a:lstStyle/>
-          <a:p>
-            <a:endParaRPr/>
-          </a:p>
+          <a:p/>
         </p:txBody>
       </p:sp>
       <p:sp>
@@ -7898,10 +7765,7 @@
         </p:spPr>
         <p:txBody>
           <a:bodyPr/>
-          <a:lstStyle/>
-          <a:p>
-            <a:endParaRPr/>
-          </a:p>
+          <a:p/>
         </p:txBody>
       </p:sp>
       <p:sp>
@@ -7932,10 +7796,7 @@
         </p:spPr>
         <p:txBody>
           <a:bodyPr/>
-          <a:lstStyle/>
-          <a:p>
-            <a:endParaRPr/>
-          </a:p>
+          <a:p/>
         </p:txBody>
       </p:sp>
       <p:sp>
@@ -8078,10 +7939,7 @@
         </p:spPr>
         <p:txBody>
           <a:bodyPr/>
-          <a:lstStyle/>
-          <a:p>
-            <a:endParaRPr/>
-          </a:p>
+          <a:p/>
         </p:txBody>
       </p:sp>
       <p:sp>
@@ -8148,10 +8006,7 @@
         </p:spPr>
         <p:txBody>
           <a:bodyPr/>
-          <a:lstStyle/>
-          <a:p>
-            <a:endParaRPr/>
-          </a:p>
+          <a:p/>
         </p:txBody>
       </p:sp>
       <p:sp>
@@ -8293,10 +8148,7 @@
         </p:spPr>
         <p:txBody>
           <a:bodyPr/>
-          <a:lstStyle/>
-          <a:p>
-            <a:endParaRPr/>
-          </a:p>
+          <a:p/>
         </p:txBody>
       </p:sp>
       <p:sp>
@@ -8457,21 +8309,20 @@
             </a:avLst>
           </a:prstGeom>
           <a:solidFill>
-            <a:srgbClr val="0F3156"/>
+            <a:srgbClr val="F4FAFF"/>
           </a:solidFill>
           <a:ln w="15240">
             <a:solidFill>
-              <a:srgbClr val="2EE6A6"/>
+              <a:srgbClr val="A7D8F5">
+                <a:alpha val="85000"/>
+              </a:srgbClr>
             </a:solidFill>
             <a:prstDash val="solid"/>
           </a:ln>
         </p:spPr>
         <p:txBody>
           <a:bodyPr/>
-          <a:lstStyle/>
-          <a:p>
-            <a:endParaRPr/>
-          </a:p>
+          <a:p/>
         </p:txBody>
       </p:sp>
       <p:sp>
@@ -8489,7 +8340,7 @@
             <a:avLst/>
           </a:prstGeom>
           <a:solidFill>
-            <a:srgbClr val="2EE6A6"/>
+            <a:srgbClr val="6D7F8E"/>
           </a:solidFill>
           <a:ln w="12700">
             <a:solidFill>
@@ -8502,10 +8353,7 @@
         </p:spPr>
         <p:txBody>
           <a:bodyPr/>
-          <a:lstStyle/>
-          <a:p>
-            <a:endParaRPr/>
-          </a:p>
+          <a:p/>
         </p:txBody>
       </p:sp>
       <p:sp>
@@ -8533,7 +8381,11 @@
               <a:buNone/>
             </a:pPr>
             <a:r>
-              <a:rPr lang="en-US" sz="800" b="1" dirty="0"/>
+              <a:rPr lang="en-US" sz="800" b="1" dirty="0">
+                <a:solidFill>
+                  <a:srgbClr val="FFFFFF"/>
+                </a:solidFill>
+              </a:rPr>
               <a:t>A</a:t>
             </a:r>
             <a:endParaRPr lang="en-US" sz="800" dirty="0"/>
@@ -8646,10 +8498,7 @@
         </p:spPr>
         <p:txBody>
           <a:bodyPr/>
-          <a:lstStyle/>
-          <a:p>
-            <a:endParaRPr/>
-          </a:p>
+          <a:p/>
         </p:txBody>
       </p:sp>
       <p:sp>
@@ -8680,10 +8529,7 @@
         </p:spPr>
         <p:txBody>
           <a:bodyPr/>
-          <a:lstStyle/>
-          <a:p>
-            <a:endParaRPr/>
-          </a:p>
+          <a:p/>
         </p:txBody>
       </p:sp>
       <p:sp>
@@ -8828,10 +8674,7 @@
         </p:spPr>
         <p:txBody>
           <a:bodyPr/>
-          <a:lstStyle/>
-          <a:p>
-            <a:endParaRPr/>
-          </a:p>
+          <a:p/>
         </p:txBody>
       </p:sp>
       <p:sp>
@@ -8862,10 +8705,7 @@
         </p:spPr>
         <p:txBody>
           <a:bodyPr/>
-          <a:lstStyle/>
-          <a:p>
-            <a:endParaRPr/>
-          </a:p>
+          <a:p/>
         </p:txBody>
       </p:sp>
       <p:sp>
@@ -9044,10 +8884,7 @@
         </p:spPr>
         <p:txBody>
           <a:bodyPr/>
-          <a:lstStyle/>
-          <a:p>
-            <a:endParaRPr/>
-          </a:p>
+          <a:p/>
         </p:txBody>
       </p:sp>
       <p:sp>
@@ -9189,10 +9026,7 @@
         </p:spPr>
         <p:txBody>
           <a:bodyPr/>
-          <a:lstStyle/>
-          <a:p>
-            <a:endParaRPr/>
-          </a:p>
+          <a:p/>
         </p:txBody>
       </p:sp>
       <p:sp>
@@ -9366,10 +9200,7 @@
         </p:spPr>
         <p:txBody>
           <a:bodyPr/>
-          <a:lstStyle/>
-          <a:p>
-            <a:endParaRPr/>
-          </a:p>
+          <a:p/>
         </p:txBody>
       </p:sp>
       <p:sp>
@@ -9436,10 +9267,7 @@
         </p:spPr>
         <p:txBody>
           <a:bodyPr/>
-          <a:lstStyle/>
-          <a:p>
-            <a:endParaRPr/>
-          </a:p>
+          <a:p/>
         </p:txBody>
       </p:sp>
       <p:sp>
@@ -9544,10 +9372,7 @@
         </p:spPr>
         <p:txBody>
           <a:bodyPr/>
-          <a:lstStyle/>
-          <a:p>
-            <a:endParaRPr/>
-          </a:p>
+          <a:p/>
         </p:txBody>
       </p:sp>
       <p:sp>
@@ -9652,10 +9477,7 @@
         </p:spPr>
         <p:txBody>
           <a:bodyPr/>
-          <a:lstStyle/>
-          <a:p>
-            <a:endParaRPr/>
-          </a:p>
+          <a:p/>
         </p:txBody>
       </p:sp>
       <p:sp>
@@ -9762,10 +9584,7 @@
         </p:spPr>
         <p:txBody>
           <a:bodyPr/>
-          <a:lstStyle/>
-          <a:p>
-            <a:endParaRPr/>
-          </a:p>
+          <a:p/>
         </p:txBody>
       </p:sp>
       <p:sp>
@@ -9830,10 +9649,7 @@
         </p:spPr>
         <p:txBody>
           <a:bodyPr/>
-          <a:lstStyle/>
-          <a:p>
-            <a:endParaRPr/>
-          </a:p>
+          <a:p/>
         </p:txBody>
       </p:sp>
       <p:sp>
@@ -9975,10 +9791,7 @@
         </p:spPr>
         <p:txBody>
           <a:bodyPr/>
-          <a:lstStyle/>
-          <a:p>
-            <a:endParaRPr/>
-          </a:p>
+          <a:p/>
         </p:txBody>
       </p:sp>
       <p:sp>
@@ -10152,10 +9965,7 @@
         </p:spPr>
         <p:txBody>
           <a:bodyPr/>
-          <a:lstStyle/>
-          <a:p>
-            <a:endParaRPr/>
-          </a:p>
+          <a:p/>
         </p:txBody>
       </p:sp>
       <p:sp>
@@ -10451,10 +10261,7 @@
         </p:spPr>
         <p:txBody>
           <a:bodyPr/>
-          <a:lstStyle/>
-          <a:p>
-            <a:endParaRPr/>
-          </a:p>
+          <a:p/>
         </p:txBody>
       </p:sp>
       <p:sp>
@@ -10561,10 +10368,7 @@
         </p:spPr>
         <p:txBody>
           <a:bodyPr/>
-          <a:lstStyle/>
-          <a:p>
-            <a:endParaRPr/>
-          </a:p>
+          <a:p/>
         </p:txBody>
       </p:sp>
       <p:sp>
@@ -10633,10 +10437,7 @@
         </p:spPr>
         <p:txBody>
           <a:bodyPr/>
-          <a:lstStyle/>
-          <a:p>
-            <a:endParaRPr/>
-          </a:p>
+          <a:p/>
         </p:txBody>
       </p:sp>
       <p:sp>
@@ -10743,10 +10544,7 @@
         </p:spPr>
         <p:txBody>
           <a:bodyPr/>
-          <a:lstStyle/>
-          <a:p>
-            <a:endParaRPr/>
-          </a:p>
+          <a:p/>
         </p:txBody>
       </p:sp>
       <p:sp>
@@ -10853,10 +10651,7 @@
         </p:spPr>
         <p:txBody>
           <a:bodyPr/>
-          <a:lstStyle/>
-          <a:p>
-            <a:endParaRPr/>
-          </a:p>
+          <a:p/>
         </p:txBody>
       </p:sp>
       <p:sp>
@@ -10963,10 +10758,7 @@
         </p:spPr>
         <p:txBody>
           <a:bodyPr/>
-          <a:lstStyle/>
-          <a:p>
-            <a:endParaRPr/>
-          </a:p>
+          <a:p/>
         </p:txBody>
       </p:sp>
       <p:sp>
@@ -11073,10 +10865,7 @@
         </p:spPr>
         <p:txBody>
           <a:bodyPr/>
-          <a:lstStyle/>
-          <a:p>
-            <a:endParaRPr/>
-          </a:p>
+          <a:p/>
         </p:txBody>
       </p:sp>
       <p:sp>
@@ -11183,10 +10972,7 @@
         </p:spPr>
         <p:txBody>
           <a:bodyPr/>
-          <a:lstStyle/>
-          <a:p>
-            <a:endParaRPr/>
-          </a:p>
+          <a:p/>
         </p:txBody>
       </p:sp>
       <p:sp>
@@ -11293,10 +11079,7 @@
         </p:spPr>
         <p:txBody>
           <a:bodyPr/>
-          <a:lstStyle/>
-          <a:p>
-            <a:endParaRPr/>
-          </a:p>
+          <a:p/>
         </p:txBody>
       </p:sp>
       <p:sp>
@@ -11399,10 +11182,7 @@
         </p:spPr>
         <p:txBody>
           <a:bodyPr/>
-          <a:lstStyle/>
-          <a:p>
-            <a:endParaRPr/>
-          </a:p>
+          <a:p/>
         </p:txBody>
       </p:sp>
       <p:sp>
@@ -11544,10 +11324,7 @@
         </p:spPr>
         <p:txBody>
           <a:bodyPr/>
-          <a:lstStyle/>
-          <a:p>
-            <a:endParaRPr/>
-          </a:p>
+          <a:p/>
         </p:txBody>
       </p:sp>
       <p:sp>
@@ -11759,10 +11536,7 @@
         </p:spPr>
         <p:txBody>
           <a:bodyPr/>
-          <a:lstStyle/>
-          <a:p>
-            <a:endParaRPr/>
-          </a:p>
+          <a:p/>
         </p:txBody>
       </p:sp>
       <p:sp>
@@ -11869,9 +11643,44 @@
         </p:spPr>
         <p:txBody>
           <a:bodyPr/>
-          <a:lstStyle/>
-          <a:p>
-            <a:endParaRPr/>
+          <a:p/>
+        </p:txBody>
+      </p:sp>
+      <p:sp>
+        <p:nvSpPr>
+          <p:cNvPr id="12" name="Text 9"/>
+          <p:cNvSpPr/>
+          <p:nvPr/>
+        </p:nvSpPr>
+        <p:spPr>
+          <a:xfrm>
+            <a:off x="1600200" y="3776472"/>
+            <a:ext cx="8503920" cy="109728"/>
+          </a:xfrm>
+          <a:prstGeom prst="rect">
+            <a:avLst/>
+          </a:prstGeom>
+          <a:noFill/>
+          <a:ln/>
+        </p:spPr>
+        <p:txBody>
+          <a:bodyPr wrap="square" lIns="0" tIns="0" rIns="0" bIns="0" rtlCol="0" anchor="ctr">
+            <a:normAutofit/>
+          </a:bodyPr>
+          <a:lstStyle/>
+          <a:p>
+            <a:pPr marL="0" indent="0" algn="ctr">
+              <a:buNone/>
+            </a:pPr>
+            <a:r>
+              <a:rPr lang="en-US" sz="1080" b="1" dirty="0">
+                <a:solidFill>
+                  <a:srgbClr val="FFC857"/>
+                </a:solidFill>
+              </a:rPr>
+              <a:t>Student answers might include: remember decisions, prove results, share ideas, or avoid mistakes.</a:t>
+            </a:r>
+            <a:endParaRPr lang="en-US" sz="1080" dirty="0"/>
           </a:p>
         </p:txBody>
       </p:sp>
@@ -11939,10 +11748,7 @@
         </p:spPr>
         <p:txBody>
           <a:bodyPr/>
-          <a:lstStyle/>
-          <a:p>
-            <a:endParaRPr/>
-          </a:p>
+          <a:p/>
         </p:txBody>
       </p:sp>
       <p:sp>
@@ -12084,10 +11890,7 @@
         </p:spPr>
         <p:txBody>
           <a:bodyPr/>
-          <a:lstStyle/>
-          <a:p>
-            <a:endParaRPr/>
-          </a:p>
+          <a:p/>
         </p:txBody>
       </p:sp>
       <p:sp>
@@ -12299,10 +12102,7 @@
         </p:spPr>
         <p:txBody>
           <a:bodyPr/>
-          <a:lstStyle/>
-          <a:p>
-            <a:endParaRPr/>
-          </a:p>
+          <a:p/>
         </p:txBody>
       </p:sp>
       <p:sp>
@@ -12411,10 +12211,7 @@
         </p:spPr>
         <p:txBody>
           <a:bodyPr/>
-          <a:lstStyle/>
-          <a:p>
-            <a:endParaRPr/>
-          </a:p>
+          <a:p/>
         </p:txBody>
       </p:sp>
       <p:sp>
@@ -12523,10 +12320,7 @@
         </p:spPr>
         <p:txBody>
           <a:bodyPr/>
-          <a:lstStyle/>
-          <a:p>
-            <a:endParaRPr/>
-          </a:p>
+          <a:p/>
         </p:txBody>
       </p:sp>
       <p:sp>
@@ -12635,10 +12429,7 @@
         </p:spPr>
         <p:txBody>
           <a:bodyPr/>
-          <a:lstStyle/>
-          <a:p>
-            <a:endParaRPr/>
-          </a:p>
+          <a:p/>
         </p:txBody>
       </p:sp>
       <p:sp>
@@ -12781,10 +12572,7 @@
         </p:spPr>
         <p:txBody>
           <a:bodyPr/>
-          <a:lstStyle/>
-          <a:p>
-            <a:endParaRPr/>
-          </a:p>
+          <a:p/>
         </p:txBody>
       </p:sp>
       <p:sp>
@@ -12926,10 +12714,7 @@
         </p:spPr>
         <p:txBody>
           <a:bodyPr/>
-          <a:lstStyle/>
-          <a:p>
-            <a:endParaRPr/>
-          </a:p>
+          <a:p/>
         </p:txBody>
       </p:sp>
       <p:sp>
@@ -13139,10 +12924,7 @@
         </p:spPr>
         <p:txBody>
           <a:bodyPr/>
-          <a:lstStyle/>
-          <a:p>
-            <a:endParaRPr/>
-          </a:p>
+          <a:p/>
         </p:txBody>
       </p:sp>
       <p:sp>
@@ -13173,10 +12955,7 @@
         </p:spPr>
         <p:txBody>
           <a:bodyPr/>
-          <a:lstStyle/>
-          <a:p>
-            <a:endParaRPr/>
-          </a:p>
+          <a:p/>
         </p:txBody>
       </p:sp>
       <p:sp>
@@ -13319,10 +13098,7 @@
         </p:spPr>
         <p:txBody>
           <a:bodyPr/>
-          <a:lstStyle/>
-          <a:p>
-            <a:endParaRPr/>
-          </a:p>
+          <a:p/>
         </p:txBody>
       </p:sp>
       <p:sp>
@@ -13353,10 +13129,7 @@
         </p:spPr>
         <p:txBody>
           <a:bodyPr/>
-          <a:lstStyle/>
-          <a:p>
-            <a:endParaRPr/>
-          </a:p>
+          <a:p/>
         </p:txBody>
       </p:sp>
       <p:sp>
@@ -13499,10 +13272,7 @@
         </p:spPr>
         <p:txBody>
           <a:bodyPr/>
-          <a:lstStyle/>
-          <a:p>
-            <a:endParaRPr/>
-          </a:p>
+          <a:p/>
         </p:txBody>
       </p:sp>
       <p:sp>
@@ -13533,10 +13303,7 @@
         </p:spPr>
         <p:txBody>
           <a:bodyPr/>
-          <a:lstStyle/>
-          <a:p>
-            <a:endParaRPr/>
-          </a:p>
+          <a:p/>
         </p:txBody>
       </p:sp>
       <p:sp>
@@ -13679,10 +13446,7 @@
         </p:spPr>
         <p:txBody>
           <a:bodyPr/>
-          <a:lstStyle/>
-          <a:p>
-            <a:endParaRPr/>
-          </a:p>
+          <a:p/>
         </p:txBody>
       </p:sp>
       <p:sp>
@@ -13713,10 +13477,7 @@
         </p:spPr>
         <p:txBody>
           <a:bodyPr/>
-          <a:lstStyle/>
-          <a:p>
-            <a:endParaRPr/>
-          </a:p>
+          <a:p/>
         </p:txBody>
       </p:sp>
       <p:sp>
@@ -13859,10 +13620,7 @@
         </p:spPr>
         <p:txBody>
           <a:bodyPr/>
-          <a:lstStyle/>
-          <a:p>
-            <a:endParaRPr/>
-          </a:p>
+          <a:p/>
         </p:txBody>
       </p:sp>
       <p:sp>
@@ -13929,10 +13687,7 @@
         </p:spPr>
         <p:txBody>
           <a:bodyPr/>
-          <a:lstStyle/>
-          <a:p>
-            <a:endParaRPr/>
-          </a:p>
+          <a:p/>
         </p:txBody>
       </p:sp>
       <p:sp>
@@ -14074,10 +13829,7 @@
         </p:spPr>
         <p:txBody>
           <a:bodyPr/>
-          <a:lstStyle/>
-          <a:p>
-            <a:endParaRPr/>
-          </a:p>
+          <a:p/>
         </p:txBody>
       </p:sp>
       <p:sp>
@@ -14287,10 +14039,7 @@
         </p:spPr>
         <p:txBody>
           <a:bodyPr/>
-          <a:lstStyle/>
-          <a:p>
-            <a:endParaRPr/>
-          </a:p>
+          <a:p/>
         </p:txBody>
       </p:sp>
       <p:sp>
@@ -14361,10 +14110,7 @@
         </p:spPr>
         <p:txBody>
           <a:bodyPr/>
-          <a:lstStyle/>
-          <a:p>
-            <a:endParaRPr/>
-          </a:p>
+          <a:p/>
         </p:txBody>
       </p:sp>
       <p:sp>
@@ -14473,10 +14219,7 @@
         </p:spPr>
         <p:txBody>
           <a:bodyPr/>
-          <a:lstStyle/>
-          <a:p>
-            <a:endParaRPr/>
-          </a:p>
+          <a:p/>
         </p:txBody>
       </p:sp>
       <p:sp>
@@ -14585,10 +14328,7 @@
         </p:spPr>
         <p:txBody>
           <a:bodyPr/>
-          <a:lstStyle/>
-          <a:p>
-            <a:endParaRPr/>
-          </a:p>
+          <a:p/>
         </p:txBody>
       </p:sp>
       <p:sp>
@@ -14693,10 +14433,7 @@
         </p:spPr>
         <p:txBody>
           <a:bodyPr/>
-          <a:lstStyle/>
-          <a:p>
-            <a:endParaRPr/>
-          </a:p>
+          <a:p/>
         </p:txBody>
       </p:sp>
       <p:sp>
@@ -14838,10 +14575,7 @@
         </p:spPr>
         <p:txBody>
           <a:bodyPr/>
-          <a:lstStyle/>
-          <a:p>
-            <a:endParaRPr/>
-          </a:p>
+          <a:p/>
         </p:txBody>
       </p:sp>
       <p:sp>
@@ -15015,10 +14749,7 @@
         </p:spPr>
         <p:txBody>
           <a:bodyPr/>
-          <a:lstStyle/>
-          <a:p>
-            <a:endParaRPr/>
-          </a:p>
+          <a:p/>
         </p:txBody>
       </p:sp>
       <p:sp>
@@ -15472,10 +15203,7 @@
         </p:spPr>
         <p:txBody>
           <a:bodyPr/>
-          <a:lstStyle/>
-          <a:p>
-            <a:endParaRPr/>
-          </a:p>
+          <a:p/>
         </p:txBody>
       </p:sp>
       <p:sp>
@@ -15925,10 +15653,7 @@
         </p:spPr>
         <p:txBody>
           <a:bodyPr/>
-          <a:lstStyle/>
-          <a:p>
-            <a:endParaRPr/>
-          </a:p>
+          <a:p/>
         </p:txBody>
       </p:sp>
       <p:sp>
@@ -15957,10 +15682,7 @@
         </p:spPr>
         <p:txBody>
           <a:bodyPr/>
-          <a:lstStyle/>
-          <a:p>
-            <a:endParaRPr/>
-          </a:p>
+          <a:p/>
         </p:txBody>
       </p:sp>
       <p:sp>
@@ -16102,10 +15824,7 @@
         </p:spPr>
         <p:txBody>
           <a:bodyPr/>
-          <a:lstStyle/>
-          <a:p>
-            <a:endParaRPr/>
-          </a:p>
+          <a:p/>
         </p:txBody>
       </p:sp>
       <p:sp>
@@ -16279,10 +15998,7 @@
         </p:spPr>
         <p:txBody>
           <a:bodyPr/>
-          <a:lstStyle/>
-          <a:p>
-            <a:endParaRPr/>
-          </a:p>
+          <a:p/>
         </p:txBody>
       </p:sp>
       <p:sp>
@@ -16810,10 +16526,7 @@
         </p:spPr>
         <p:txBody>
           <a:bodyPr/>
-          <a:lstStyle/>
-          <a:p>
-            <a:endParaRPr/>
-          </a:p>
+          <a:p/>
         </p:txBody>
       </p:sp>
       <p:sp>
@@ -16882,10 +16595,7 @@
         </p:spPr>
         <p:txBody>
           <a:bodyPr/>
-          <a:lstStyle/>
-          <a:p>
-            <a:endParaRPr/>
-          </a:p>
+          <a:p/>
         </p:txBody>
       </p:sp>
       <p:sp>
@@ -16992,10 +16702,7 @@
         </p:spPr>
         <p:txBody>
           <a:bodyPr/>
-          <a:lstStyle/>
-          <a:p>
-            <a:endParaRPr/>
-          </a:p>
+          <a:p/>
         </p:txBody>
       </p:sp>
       <p:sp>
@@ -17102,10 +16809,7 @@
         </p:spPr>
         <p:txBody>
           <a:bodyPr/>
-          <a:lstStyle/>
-          <a:p>
-            <a:endParaRPr/>
-          </a:p>
+          <a:p/>
         </p:txBody>
       </p:sp>
       <p:sp>
@@ -17212,10 +16916,7 @@
         </p:spPr>
         <p:txBody>
           <a:bodyPr/>
-          <a:lstStyle/>
-          <a:p>
-            <a:endParaRPr/>
-          </a:p>
+          <a:p/>
         </p:txBody>
       </p:sp>
       <p:sp>
@@ -17322,10 +17023,7 @@
         </p:spPr>
         <p:txBody>
           <a:bodyPr/>
-          <a:lstStyle/>
-          <a:p>
-            <a:endParaRPr/>
-          </a:p>
+          <a:p/>
         </p:txBody>
       </p:sp>
       <p:sp>
@@ -17466,10 +17164,7 @@
         </p:spPr>
         <p:txBody>
           <a:bodyPr/>
-          <a:lstStyle/>
-          <a:p>
-            <a:endParaRPr/>
-          </a:p>
+          <a:p/>
         </p:txBody>
       </p:sp>
       <p:sp>
@@ -17611,10 +17306,7 @@
         </p:spPr>
         <p:txBody>
           <a:bodyPr/>
-          <a:lstStyle/>
-          <a:p>
-            <a:endParaRPr/>
-          </a:p>
+          <a:p/>
         </p:txBody>
       </p:sp>
       <p:sp>
@@ -17788,10 +17480,7 @@
         </p:spPr>
         <p:txBody>
           <a:bodyPr/>
-          <a:lstStyle/>
-          <a:p>
-            <a:endParaRPr/>
-          </a:p>
+          <a:p/>
         </p:txBody>
       </p:sp>
       <p:sp>
@@ -18204,10 +17893,7 @@
         </p:spPr>
         <p:txBody>
           <a:bodyPr/>
-          <a:lstStyle/>
-          <a:p>
-            <a:endParaRPr/>
-          </a:p>
+          <a:p/>
         </p:txBody>
       </p:sp>
       <p:sp>
@@ -18618,10 +18304,7 @@
         </p:spPr>
         <p:txBody>
           <a:bodyPr/>
-          <a:lstStyle/>
-          <a:p>
-            <a:endParaRPr/>
-          </a:p>
+          <a:p/>
         </p:txBody>
       </p:sp>
       <p:sp>
@@ -18650,10 +18333,7 @@
         </p:spPr>
         <p:txBody>
           <a:bodyPr/>
-          <a:lstStyle/>
-          <a:p>
-            <a:endParaRPr/>
-          </a:p>
+          <a:p/>
         </p:txBody>
       </p:sp>
       <p:sp>
